--- a/slides/pptx/week08.pptx
+++ b/slides/pptx/week08.pptx
@@ -594,7 +594,7 @@
           <a:p>
             <a:r>
               <a:rPr lang="en-US" dirty="0"/>
-              <a:t>Fill the blanks aloud (e.g. 120 min, open one-page cheat sheet if you allowed it in W7). State no phones/AI; sections A–D = concepts / spot-the-vuln / applied / design (100 pts).</a:t>
+              <a:t>State it aloud exactly as printed on the paper — don't paraphrase the section split. Section C is not a "spot the vuln" bonus, it's a full quarter of the exam: students write real payloads and the reasoning behind each one, across auth-bypass, cross-DB fingerprinting, and a schema dump — per the answer key, C is graded on payload+reasoning only, zero fix credit (the fix skill is Section D's job, 10 of its 20 pts). Don't tell them to write a fix for C, it wastes their exam time. No phones/AI.</a:t>
             </a:r>
             <a:endParaRPr lang="en-US" dirty="0"/>
           </a:p>
@@ -682,7 +682,7 @@
           <a:p>
             <a:r>
               <a:rPr lang="en-US" dirty="0"/>
-              <a:t>Show briefly so expectations are clear, then move on — this is exam day, not teaching. Mirrors the W7 mock.</a:t>
+              <a:t>Section C is the one people revise least and lose the most on — it's not covered by a generic "spot the vuln" bullet, it's 30 of 100 points of writing real payloads. Show this breakdown, then move on — exam day, not teaching.</a:t>
             </a:r>
             <a:endParaRPr lang="en-US" dirty="0"/>
           </a:p>
@@ -770,7 +770,7 @@
           <a:p>
             <a:r>
               <a:rPr lang="en-US" dirty="0"/>
-              <a:t>The single biggest score-saver: name the FIX + CWE, not just "this is SQLi". Say it once, then start the clock.</a:t>
+              <a:t>The single biggest score-saver: for Section C specifically, a described payload ("I would inject a UNION") earns far less than the literal string. Say it once, then start the clock.</a:t>
             </a:r>
             <a:endParaRPr lang="en-US" dirty="0"/>
           </a:p>
@@ -1506,11 +1506,11 @@
         <p:spPr>
           <a:xfrm>
             <a:off x="457200" y="1325880"/>
-            <a:ext cx="8229600" cy="1207008"/>
+            <a:ext cx="8229600" cy="1408176"/>
           </a:xfrm>
           <a:prstGeom prst="roundRect">
             <a:avLst>
-              <a:gd name="adj" fmla="val 6061"/>
+              <a:gd name="adj" fmla="val 5195"/>
             </a:avLst>
           </a:prstGeom>
           <a:solidFill>
@@ -1535,7 +1535,7 @@
         <p:spPr>
           <a:xfrm>
             <a:off x="731520" y="1435608"/>
-            <a:ext cx="7680960" cy="987552"/>
+            <a:ext cx="7680960" cy="1188720"/>
           </a:xfrm>
           <a:prstGeom prst="rect">
             <a:avLst/>
@@ -1544,7 +1544,9 @@
           <a:ln/>
         </p:spPr>
         <p:txBody>
-          <a:bodyPr wrap="square" lIns="0" tIns="0" rIns="0" bIns="0" rtlCol="0" anchor="t"/>
+          <a:bodyPr wrap="square" lIns="0" tIns="0" rIns="0" bIns="0" rtlCol="0" anchor="t">
+            <a:normAutofit/>
+          </a:bodyPr>
           <a:lstStyle/>
           <a:p>
             <a:pPr marL="342900" indent="-342900">
@@ -1563,7 +1565,7 @@
                 <a:ea typeface="Calibri" pitchFamily="34" charset="-122"/>
                 <a:cs typeface="Calibri" pitchFamily="34" charset="-120"/>
               </a:rPr>
-              <a:t>Duration: (set by instructor)</a:t>
+              <a:t>Duration: 120 minutes</a:t>
             </a:r>
             <a:endParaRPr lang="en-US" sz="1400" dirty="0"/>
           </a:p>
@@ -1584,7 +1586,7 @@
                 <a:ea typeface="Calibri" pitchFamily="34" charset="-122"/>
                 <a:cs typeface="Calibri" pitchFamily="34" charset="-120"/>
               </a:rPr>
-              <a:t>Closed / open-note: (instructor's choice)</a:t>
+              <a:t>Closed book unless stated otherwise</a:t>
             </a:r>
             <a:endParaRPr lang="en-US" sz="1400" dirty="0"/>
           </a:p>
@@ -1605,7 +1607,7 @@
                 <a:ea typeface="Calibri" pitchFamily="34" charset="-122"/>
                 <a:cs typeface="Calibri" pitchFamily="34" charset="-120"/>
               </a:rPr>
-              <a:t>Mixed question types — concepts + applied reasoning</a:t>
+              <a:t>100 pts, 4 sections: A Concepts (30) · B Spot the Vuln (20) · C Applied SQL Injection (30) · D Design (20)</a:t>
             </a:r>
             <a:endParaRPr lang="en-US" sz="1400" dirty="0"/>
           </a:p>
@@ -1805,11 +1807,11 @@
         <p:spPr>
           <a:xfrm>
             <a:off x="457200" y="1325880"/>
-            <a:ext cx="8229600" cy="1517904"/>
+            <a:ext cx="8229600" cy="2322576"/>
           </a:xfrm>
           <a:prstGeom prst="roundRect">
             <a:avLst>
-              <a:gd name="adj" fmla="val 4819"/>
+              <a:gd name="adj" fmla="val 3150"/>
             </a:avLst>
           </a:prstGeom>
           <a:solidFill>
@@ -1834,7 +1836,7 @@
         <p:spPr>
           <a:xfrm>
             <a:off x="731520" y="1435608"/>
-            <a:ext cx="7680960" cy="1298448"/>
+            <a:ext cx="7680960" cy="2103120"/>
           </a:xfrm>
           <a:prstGeom prst="rect">
             <a:avLst/>
@@ -1843,7 +1845,9 @@
           <a:ln/>
         </p:spPr>
         <p:txBody>
-          <a:bodyPr wrap="square" lIns="0" tIns="0" rIns="0" bIns="0" rtlCol="0" anchor="t"/>
+          <a:bodyPr wrap="square" lIns="0" tIns="0" rIns="0" bIns="0" rtlCol="0" anchor="t">
+            <a:normAutofit/>
+          </a:bodyPr>
           <a:lstStyle/>
           <a:p>
             <a:pPr marL="342900" indent="-342900">
@@ -1862,7 +1866,7 @@
                 <a:ea typeface="Calibri" pitchFamily="34" charset="-122"/>
                 <a:cs typeface="Calibri" pitchFamily="34" charset="-120"/>
               </a:rPr>
-              <a:t>Threat modeling: build/critique a STRIDE model, identify trust boundaries</a:t>
+              <a:t>A — Concepts (30): CIA triad, STRIDE modeling, SAST/DAST/SCA/fuzzing, hashing vs. encryption vs. encoding, trust boundaries, least privilege / fail closed</a:t>
             </a:r>
             <a:endParaRPr lang="en-US" sz="1400" dirty="0"/>
           </a:p>
@@ -1883,7 +1887,7 @@
                 <a:ea typeface="Calibri" pitchFamily="34" charset="-122"/>
                 <a:cs typeface="Calibri" pitchFamily="34" charset="-120"/>
               </a:rPr>
-              <a:t>CWE/OWASP mapping: classify given vulnerabilities</a:t>
+              <a:t>B — Spot the Vuln (20): find &amp; name the flaw + CWE in a code snippet</a:t>
             </a:r>
             <a:endParaRPr lang="en-US" sz="1400" dirty="0"/>
           </a:p>
@@ -1904,7 +1908,7 @@
                 <a:ea typeface="Calibri" pitchFamily="34" charset="-122"/>
                 <a:cs typeface="Calibri" pitchFamily="34" charset="-120"/>
               </a:rPr>
-              <a:t>Spot the vuln: find &amp; explain the flaw in a code snippet</a:t>
+              <a:t>C — Applied SQL Injection (30): given a vulnerable endpoint, write the payload and the reasoning — auth bypass, cross-DB fingerprinting, schema/table dump. No fix credit here — that's Section D's job</a:t>
             </a:r>
             <a:endParaRPr lang="en-US" sz="1400" dirty="0"/>
           </a:p>
@@ -1925,7 +1929,7 @@
                 <a:ea typeface="Calibri" pitchFamily="34" charset="-122"/>
                 <a:cs typeface="Calibri" pitchFamily="34" charset="-120"/>
               </a:rPr>
-              <a:t>Secure design: least privilege, defense in depth, fail closed</a:t>
+              <a:t>D — Design (20): SQLi defenses (incl. the fix Section C doesn't grade); design a secure password-reset flow</a:t>
             </a:r>
             <a:endParaRPr lang="en-US" sz="1400" dirty="0"/>
           </a:p>
@@ -2125,11 +2129,11 @@
         <p:spPr>
           <a:xfrm>
             <a:off x="457200" y="1325880"/>
-            <a:ext cx="8229600" cy="1207008"/>
+            <a:ext cx="8229600" cy="1719072"/>
           </a:xfrm>
           <a:prstGeom prst="roundRect">
             <a:avLst>
-              <a:gd name="adj" fmla="val 6061"/>
+              <a:gd name="adj" fmla="val 4255"/>
             </a:avLst>
           </a:prstGeom>
           <a:solidFill>
@@ -2154,7 +2158,7 @@
         <p:spPr>
           <a:xfrm>
             <a:off x="731520" y="1435608"/>
-            <a:ext cx="7680960" cy="987552"/>
+            <a:ext cx="7680960" cy="1499616"/>
           </a:xfrm>
           <a:prstGeom prst="rect">
             <a:avLst/>
@@ -2163,7 +2167,9 @@
           <a:ln/>
         </p:spPr>
         <p:txBody>
-          <a:bodyPr wrap="square" lIns="0" tIns="0" rIns="0" bIns="0" rtlCol="0" anchor="t"/>
+          <a:bodyPr wrap="square" lIns="0" tIns="0" rIns="0" bIns="0" rtlCol="0" anchor="t">
+            <a:normAutofit/>
+          </a:bodyPr>
           <a:lstStyle/>
           <a:p>
             <a:pPr marL="342900" indent="-342900">
@@ -2203,7 +2209,28 @@
                 <a:ea typeface="Calibri" pitchFamily="34" charset="-122"/>
                 <a:cs typeface="Calibri" pitchFamily="34" charset="-120"/>
               </a:rPr>
-              <a:t>Name the fix, not just the bug</a:t>
+              <a:t>For Section C: write the actual payload, not a description of one — plus the one-line reasoning. No fix credit in C; don't spend exam time writing one there</a:t>
+            </a:r>
+            <a:endParaRPr lang="en-US" sz="1400" dirty="0"/>
+          </a:p>
+          <a:p>
+            <a:pPr marL="342900" indent="-342900">
+              <a:spcAft>
+                <a:spcPts val="600"/>
+              </a:spcAft>
+              <a:buSzPct val="100000"/>
+              <a:buChar char="•"/>
+            </a:pPr>
+            <a:r>
+              <a:rPr lang="en-US" sz="1400" dirty="0">
+                <a:solidFill>
+                  <a:srgbClr val="1F2937"/>
+                </a:solidFill>
+                <a:latin typeface="Calibri" pitchFamily="34" charset="0"/>
+                <a:ea typeface="Calibri" pitchFamily="34" charset="-122"/>
+                <a:cs typeface="Calibri" pitchFamily="34" charset="-120"/>
+              </a:rPr>
+              <a:t>Name the fix, not just the bug, for B and D</a:t>
             </a:r>
             <a:endParaRPr lang="en-US" sz="1400" dirty="0"/>
           </a:p>
